--- a/docs/09_presentation/Presentation_BMU_Verification.pptx
+++ b/docs/09_presentation/Presentation_BMU_Verification.pptx
@@ -6255,7 +6255,7 @@
               </a:defRPr>
             </a:pPr>
             <a:r>
-              <a:t>Follow one MAX request from sequence creation to root-cause evidence.</a:t>
+              <a:t>Follow one MAX request from sequence creation to scoreboard evidence and root-cause analysis.</a:t>
             </a:r>
           </a:p>
         </p:txBody>
@@ -7639,7 +7639,7 @@
               </a:defRPr>
             </a:pPr>
             <a:r>
-              <a:t>Who checks the checker?</a:t>
+              <a:t>Who is checking the checker?</a:t>
             </a:r>
           </a:p>
         </p:txBody>
@@ -7684,7 +7684,7 @@
               </a:defRPr>
             </a:pPr>
             <a:r>
-              <a:t>A useful failure must distinguish a DUT defect from a testbench mistake.</a:t>
+              <a:t>A useful failure must distinguish a DUT defect from a testbench issue using independent prediction, assertions, and a clean signal contract.</a:t>
             </a:r>
           </a:p>
         </p:txBody>
@@ -11962,7 +11962,7 @@
               </a:defRPr>
             </a:pPr>
             <a:r>
-              <a:t>Assertions guard behavior across cycles</a:t>
+              <a:t>Assertions guard protocol behavior across cycles</a:t>
             </a:r>
           </a:p>
         </p:txBody>
@@ -12007,7 +12007,7 @@
               </a:defRPr>
             </a:pPr>
             <a:r>
-              <a:t>The scoreboard checks data. Assertions express signal-level and temporal rules.</a:t>
+              <a:t>The scoreboard checks data. Assertions express signal-level and temporal rules for reset, hold, guard, and error behavior.</a:t>
             </a:r>
           </a:p>
         </p:txBody>
@@ -13108,25 +13108,8 @@
           </a:bodyPr>
           <a:lstStyle/>
           <a:p>
-            <a:pPr algn="l">
-              <a:lnSpc>
-                <a:spcPct val="110000"/>
-              </a:lnSpc>
-              <a:spcBef>
-                <a:spcPts val="0"/>
-              </a:spcBef>
-              <a:spcAft>
-                <a:spcPts val="500"/>
-              </a:spcAft>
-              <a:defRPr sz="3000" b="1">
-                <a:solidFill>
-                  <a:srgbClr val="20334E"/>
-                </a:solidFill>
-                <a:latin typeface="Aptos"/>
-              </a:defRPr>
-            </a:pPr>
-            <a:r>
-              <a:t>Coverage measures exercise, not correctness</a:t>
+            <a:r>
+              <a:t>Coverage measures exercise; assertions + independent prediction confirm correctness and make the flow CI-ready</a:t>
             </a:r>
           </a:p>
         </p:txBody>
@@ -13171,7 +13154,7 @@
               </a:defRPr>
             </a:pPr>
             <a:r>
-              <a:t>Different coverage types answer different questions.</a:t>
+              <a:t>Different coverage types answer different verification questions.</a:t>
             </a:r>
           </a:p>
         </p:txBody>
@@ -13873,7 +13856,7 @@
               </a:defRPr>
             </a:pPr>
             <a:r>
-              <a:t>Can functional coverage be 100% while the DUT is wrong? Yes—this project demonstrates it.</a:t>
+              <a:t>Can functional coverage be 100% while the DUT is still wrong? Yes — this project demonstrates exactly that.</a:t>
             </a:r>
           </a:p>
         </p:txBody>
@@ -14070,25 +14053,8 @@
           </a:bodyPr>
           <a:lstStyle/>
           <a:p>
-            <a:pPr algn="l">
-              <a:lnSpc>
-                <a:spcPct val="110000"/>
-              </a:lnSpc>
-              <a:spcBef>
-                <a:spcPts val="0"/>
-              </a:spcBef>
-              <a:spcAft>
-                <a:spcPts val="500"/>
-              </a:spcAft>
-              <a:defRPr sz="1700" b="0">
-                <a:solidFill>
-                  <a:srgbClr val="586B82"/>
-                </a:solidFill>
-                <a:latin typeface="Aptos"/>
-              </a:defRPr>
-            </a:pPr>
-            <a:r>
-              <a:t>Finite sweeps complement random testing and make coverage closure deliberate.</a:t>
+            <a:r>
+              <a:t>Finite sweeps, assertions, and random testing form a CI-ready verification stack for deliberate coverage closure and quality gating.</a:t>
             </a:r>
           </a:p>
         </p:txBody>
@@ -19276,7 +19242,7 @@
               </a:defRPr>
             </a:pPr>
             <a:r>
-              <a:t>The route through the project</a:t>
+              <a:t>The route through an advanced verification project</a:t>
             </a:r>
           </a:p>
         </p:txBody>
@@ -20677,7 +20643,7 @@
               </a:defRPr>
             </a:pPr>
             <a:r>
-              <a:t>Audience checkpoints: predict a result • classify a failure • interpret coverage.</a:t>
+              <a:t>Audience checkpoints: predict a result • classify a failure • read assertions, coverage, and bug evidence.</a:t>
             </a:r>
           </a:p>
         </p:txBody>
@@ -20892,7 +20858,7 @@
               </a:defRPr>
             </a:pPr>
             <a:r>
-              <a:t>The repository contains fix_v1 code. It is separate from the measured submission DUT.</a:t>
+              <a:t>The repository contains exploratory fix_v1 code. It is deliberately separated from the measured submission-DUT baseline.</a:t>
             </a:r>
           </a:p>
         </p:txBody>
@@ -22295,7 +22261,7 @@
               </a:defRPr>
             </a:pPr>
             <a:r>
-              <a:t>When can we honestly call a bug fixed?</a:t>
+              <a:t>When can we honestly call a bug fixed with evidence?</a:t>
             </a:r>
           </a:p>
         </p:txBody>
@@ -23528,25 +23494,8 @@
           </a:bodyPr>
           <a:lstStyle/>
           <a:p>
-            <a:pPr algn="l">
-              <a:lnSpc>
-                <a:spcPct val="110000"/>
-              </a:lnSpc>
-              <a:spcBef>
-                <a:spcPts val="0"/>
-              </a:spcBef>
-              <a:spcAft>
-                <a:spcPts val="500"/>
-              </a:spcAft>
-              <a:defRPr sz="3000" b="1">
-                <a:solidFill>
-                  <a:srgbClr val="20334E"/>
-                </a:solidFill>
-                <a:latin typeface="Aptos"/>
-              </a:defRPr>
-            </a:pPr>
-            <a:r>
-              <a:t>What this verification established</a:t>
+            <a:r>
+              <a:t>What this project demonstrates: advanced verification capability</a:t>
             </a:r>
           </a:p>
         </p:txBody>
@@ -23591,7 +23540,7 @@
               </a:defRPr>
             </a:pPr>
             <a:r>
-              <a:t>A traceable path from requirements to reproducible evidence.</a:t>
+              <a:t>A traceable path from specification to reproducible evidence and validated defect closure discipline.</a:t>
             </a:r>
           </a:p>
         </p:txBody>
@@ -30123,7 +30072,7 @@
               </a:defRPr>
             </a:pPr>
             <a:r>
-              <a:t>Use properties, functional bins, and code metrics together.</a:t>
+              <a:t>Use properties, functional bins, and code metrics together to build a verification stack that is both rigorous and CI-friendly.</a:t>
             </a:r>
           </a:p>
         </p:txBody>
@@ -39827,7 +39776,7 @@
               </a:defRPr>
             </a:pPr>
             <a:r>
-              <a:t>The UVM environment: two flows, one verdict</a:t>
+              <a:t>The UVM environment: from sequence item to verdict</a:t>
             </a:r>
           </a:p>
         </p:txBody>
@@ -39872,7 +39821,7 @@
               </a:defRPr>
             </a:pPr>
             <a:r>
-              <a:t>Stimulus travels toward the DUT. Observations fan out to checking and coverage.</a:t>
+              <a:t>Stimulus travels toward the DUT; observations fan out to the scoreboard, assertions, and coverage.</a:t>
             </a:r>
           </a:p>
         </p:txBody>
@@ -42093,7 +42042,7 @@
               </a:defRPr>
             </a:pPr>
             <a:r>
-              <a:t>Predict from observed inputs. Compare both result_ff and error.</a:t>
+              <a:t>Predict from observed inputs. Compare result_ff and error under a fully independent reference model.</a:t>
             </a:r>
           </a:p>
         </p:txBody>
@@ -43012,25 +42961,8 @@
           </a:bodyPr>
           <a:lstStyle/>
           <a:p>
-            <a:pPr algn="l">
-              <a:lnSpc>
-                <a:spcPct val="110000"/>
-              </a:lnSpc>
-              <a:spcBef>
-                <a:spcPts val="0"/>
-              </a:spcBef>
-              <a:spcAft>
-                <a:spcPts val="500"/>
-              </a:spcAft>
-              <a:defRPr sz="2100" b="0">
-                <a:solidFill>
-                  <a:srgbClr val="20334E"/>
-                </a:solidFill>
-                <a:latin typeface="Aptos"/>
-              </a:defRPr>
-            </a:pPr>
-            <a:r>
-              <a:t>What are result_ff and error?</a:t>
+            <a:r>
+              <a:t>What should result_ff and error be for a legal signed MAX request?</a:t>
             </a:r>
           </a:p>
         </p:txBody>
@@ -43320,25 +43252,8 @@
           </a:bodyPr>
           <a:lstStyle/>
           <a:p>
-            <a:pPr algn="l">
-              <a:lnSpc>
-                <a:spcPct val="110000"/>
-              </a:lnSpc>
-              <a:spcBef>
-                <a:spcPts val="0"/>
-              </a:spcBef>
-              <a:spcAft>
-                <a:spcPts val="500"/>
-              </a:spcAft>
-              <a:defRPr sz="1700" b="0">
-                <a:solidFill>
-                  <a:srgbClr val="586B82"/>
-                </a:solidFill>
-                <a:latin typeface="Aptos"/>
-              </a:defRPr>
-            </a:pPr>
-            <a:r>
-              <a:t>Sequence → sequencer → driver → interface → DUT</a:t>
+            <a:r>
+              <a:t>Sequence item → sequencer → driver → interface → DUT → monitor → predictor → scoreboard</a:t>
             </a:r>
           </a:p>
         </p:txBody>
@@ -43793,25 +43708,23 @@
           </a:bodyPr>
           <a:lstStyle/>
           <a:p>
-            <a:pPr algn="l">
-              <a:lnSpc>
-                <a:spcPct val="110000"/>
-              </a:lnSpc>
-              <a:spcBef>
-                <a:spcPts val="0"/>
-              </a:spcBef>
-              <a:spcAft>
-                <a:spcPts val="500"/>
-              </a:spcAft>
-              <a:defRPr sz="2100" b="1">
-                <a:solidFill>
-                  <a:srgbClr val="2563B7"/>
-                </a:solidFill>
-                <a:latin typeface="Aptos"/>
-              </a:defRPr>
-            </a:pPr>
             <a:r>
               <a:t>10 ns: falling edge</a:t>
+            </a:r>
+          </a:p>
+          <a:p>
+            <a:r>
+              <a:t>Drive legal request: max=1, sub=1, a=10, b=20</a:t>
+            </a:r>
+          </a:p>
+          <a:p>
+            <a:r>
+              <a:t>15 ns: rising edge</a:t>
+            </a:r>
+          </a:p>
+          <a:p>
+            <a:r>
+              <a:t>Monitor captures result_ff and compares with the expected result</a:t>
             </a:r>
           </a:p>
         </p:txBody>
